--- a/docs/P-FM_NEWS_실무자_발표.pptx
+++ b/docs/P-FM_NEWS_실무자_발표.pptx
@@ -6167,7 +6167,7 @@
                 </a:solidFill>
                 <a:latin typeface="맑은 고딕"/>
               </a:rPr>
-              <a:t>하루 수천 건 기사, 놓치면 안 되는 것은 소수</a:t>
+              <a:t>하루 367건, 사람이 다 읽으면 1년에 11,163시간</a:t>
             </a:r>
           </a:p>
         </p:txBody>
@@ -6206,7 +6206,7 @@
                 </a:solidFill>
                 <a:latin typeface="맑은 고딕"/>
               </a:rPr>
-              <a:t>관련 뉴스를 사람이 매일 훑는 것은 불가능하고, 정작 중요한 건은 묻힙니다.</a:t>
+              <a:t>기사가 넘쳐날수록 판단 기준은 사람마다 달라지고, 일관성을 지키기 어렵습니다.</a:t>
             </a:r>
           </a:p>
         </p:txBody>
@@ -6257,53 +6257,14 @@
       </p:sp>
       <p:sp>
         <p:nvSpPr>
-          <p:cNvPr id="8" name="TextBox 7"/>
-          <p:cNvSpPr txBox="1"/>
+          <p:cNvPr id="8" name="Rounded Rectangle 7"/>
+          <p:cNvSpPr/>
           <p:nvPr/>
         </p:nvSpPr>
         <p:spPr>
           <a:xfrm>
             <a:off x="658368" y="1965960"/>
-            <a:ext cx="10874959" cy="365760"/>
-          </a:xfrm>
-          <a:prstGeom prst="rect">
-            <a:avLst/>
-          </a:prstGeom>
-          <a:noFill/>
-        </p:spPr>
-        <p:txBody>
-          <a:bodyPr wrap="square" anchor="t" lIns="0" rIns="0" tIns="0" bIns="0">
-            <a:spAutoFit/>
-          </a:bodyPr>
-          <a:lstStyle/>
-          <a:p>
-            <a:pPr algn="l">
-              <a:lnSpc>
-                <a:spcPct val="100000"/>
-              </a:lnSpc>
-            </a:pPr>
-            <a:r>
-              <a:rPr sz="1300" b="1">
-                <a:solidFill>
-                  <a:srgbClr val="0E2456"/>
-                </a:solidFill>
-                <a:latin typeface="맑은 고딕"/>
-              </a:rPr>
-              <a:t>하루에 들어오는 기사</a:t>
-            </a:r>
-          </a:p>
-        </p:txBody>
-      </p:sp>
-      <p:sp>
-        <p:nvSpPr>
-          <p:cNvPr id="9" name="Rounded Rectangle 8"/>
-          <p:cNvSpPr/>
-          <p:nvPr/>
-        </p:nvSpPr>
-        <p:spPr>
-          <a:xfrm>
-            <a:off x="658368" y="2377440"/>
-            <a:ext cx="10874959" cy="603504"/>
+            <a:ext cx="3442106" cy="1417320"/>
           </a:xfrm>
           <a:prstGeom prst="roundRect">
             <a:avLst>
@@ -6344,98 +6305,20 @@
       </p:sp>
       <p:sp>
         <p:nvSpPr>
-          <p:cNvPr id="10" name="TextBox 9"/>
-          <p:cNvSpPr txBox="1"/>
-          <p:nvPr/>
-        </p:nvSpPr>
-        <p:spPr>
-          <a:xfrm>
-            <a:off x="932688" y="2523744"/>
-            <a:ext cx="2926080" cy="365760"/>
-          </a:xfrm>
-          <a:prstGeom prst="rect">
-            <a:avLst/>
-          </a:prstGeom>
-          <a:noFill/>
-        </p:spPr>
-        <p:txBody>
-          <a:bodyPr wrap="square" anchor="t" lIns="0" rIns="0" tIns="0" bIns="0">
-            <a:spAutoFit/>
-          </a:bodyPr>
-          <a:lstStyle/>
-          <a:p>
-            <a:pPr algn="l">
-              <a:lnSpc>
-                <a:spcPct val="100000"/>
-              </a:lnSpc>
-            </a:pPr>
-            <a:r>
-              <a:rPr sz="2200" b="1">
-                <a:solidFill>
-                  <a:srgbClr val="16337A"/>
-                </a:solidFill>
-                <a:latin typeface="맑은 고딕"/>
-              </a:rPr>
-              <a:t>약 3,600건</a:t>
-            </a:r>
-          </a:p>
-        </p:txBody>
-      </p:sp>
-      <p:sp>
-        <p:nvSpPr>
-          <p:cNvPr id="11" name="TextBox 10"/>
-          <p:cNvSpPr txBox="1"/>
-          <p:nvPr/>
-        </p:nvSpPr>
-        <p:spPr>
-          <a:xfrm>
-            <a:off x="3767328" y="2578608"/>
-            <a:ext cx="7583119" cy="365760"/>
-          </a:xfrm>
-          <a:prstGeom prst="rect">
-            <a:avLst/>
-          </a:prstGeom>
-          <a:noFill/>
-        </p:spPr>
-        <p:txBody>
-          <a:bodyPr wrap="square" anchor="t" lIns="0" rIns="0" tIns="0" bIns="0">
-            <a:spAutoFit/>
-          </a:bodyPr>
-          <a:lstStyle/>
-          <a:p>
-            <a:pPr algn="l">
-              <a:lnSpc>
-                <a:spcPct val="120000"/>
-              </a:lnSpc>
-            </a:pPr>
-            <a:r>
-              <a:rPr sz="1150" b="0">
-                <a:solidFill>
-                  <a:srgbClr val="5B6476"/>
-                </a:solidFill>
-                <a:latin typeface="맑은 고딕"/>
-              </a:rPr>
-              <a:t>네이버·구글·언론사 RSS 에서 그룹사·이차전지·정책·통상 키워드로 수집</a:t>
-            </a:r>
-          </a:p>
-        </p:txBody>
-      </p:sp>
-      <p:sp>
-        <p:nvSpPr>
-          <p:cNvPr id="12" name="Right Arrow 11"/>
+          <p:cNvPr id="9" name="Rectangle 8"/>
           <p:cNvSpPr/>
           <p:nvPr/>
         </p:nvSpPr>
         <p:spPr>
           <a:xfrm>
-            <a:off x="5912967" y="3218688"/>
-            <a:ext cx="365760" cy="201168"/>
-          </a:xfrm>
-          <a:prstGeom prst="rightArrow">
+            <a:off x="658368" y="1965960"/>
+            <a:ext cx="3442106" cy="64008"/>
+          </a:xfrm>
+          <a:prstGeom prst="rect">
             <a:avLst/>
           </a:prstGeom>
           <a:solidFill>
-            <a:srgbClr val="C8D6F0"/>
+            <a:srgbClr val="16337A"/>
           </a:solidFill>
           <a:ln>
             <a:noFill/>
@@ -6466,14 +6349,131 @@
       </p:sp>
       <p:sp>
         <p:nvSpPr>
+          <p:cNvPr id="10" name="TextBox 9"/>
+          <p:cNvSpPr txBox="1"/>
+          <p:nvPr/>
+        </p:nvSpPr>
+        <p:spPr>
+          <a:xfrm>
+            <a:off x="877824" y="2157984"/>
+            <a:ext cx="3003194" cy="457200"/>
+          </a:xfrm>
+          <a:prstGeom prst="rect">
+            <a:avLst/>
+          </a:prstGeom>
+          <a:noFill/>
+        </p:spPr>
+        <p:txBody>
+          <a:bodyPr wrap="square" anchor="t" lIns="0" rIns="0" tIns="0" bIns="0">
+            <a:spAutoFit/>
+          </a:bodyPr>
+          <a:lstStyle/>
+          <a:p>
+            <a:pPr algn="l">
+              <a:lnSpc>
+                <a:spcPct val="115000"/>
+              </a:lnSpc>
+            </a:pPr>
+            <a:r>
+              <a:rPr sz="1150" b="1">
+                <a:solidFill>
+                  <a:srgbClr val="5B6476"/>
+                </a:solidFill>
+                <a:latin typeface="맑은 고딕"/>
+              </a:rPr>
+              <a:t>하루 수집 기사</a:t>
+            </a:r>
+          </a:p>
+        </p:txBody>
+      </p:sp>
+      <p:sp>
+        <p:nvSpPr>
+          <p:cNvPr id="11" name="TextBox 10"/>
+          <p:cNvSpPr txBox="1"/>
+          <p:nvPr/>
+        </p:nvSpPr>
+        <p:spPr>
+          <a:xfrm>
+            <a:off x="877824" y="2523744"/>
+            <a:ext cx="3003194" cy="457200"/>
+          </a:xfrm>
+          <a:prstGeom prst="rect">
+            <a:avLst/>
+          </a:prstGeom>
+          <a:noFill/>
+        </p:spPr>
+        <p:txBody>
+          <a:bodyPr wrap="square" anchor="t" lIns="0" rIns="0" tIns="0" bIns="0">
+            <a:spAutoFit/>
+          </a:bodyPr>
+          <a:lstStyle/>
+          <a:p>
+            <a:pPr algn="l">
+              <a:lnSpc>
+                <a:spcPct val="100000"/>
+              </a:lnSpc>
+            </a:pPr>
+            <a:r>
+              <a:rPr sz="2500" b="1">
+                <a:solidFill>
+                  <a:srgbClr val="16337A"/>
+                </a:solidFill>
+                <a:latin typeface="맑은 고딕"/>
+              </a:rPr>
+              <a:t>367건</a:t>
+            </a:r>
+          </a:p>
+        </p:txBody>
+      </p:sp>
+      <p:sp>
+        <p:nvSpPr>
+          <p:cNvPr id="12" name="TextBox 11"/>
+          <p:cNvSpPr txBox="1"/>
+          <p:nvPr/>
+        </p:nvSpPr>
+        <p:spPr>
+          <a:xfrm>
+            <a:off x="877824" y="2980944"/>
+            <a:ext cx="3003194" cy="384048"/>
+          </a:xfrm>
+          <a:prstGeom prst="rect">
+            <a:avLst/>
+          </a:prstGeom>
+          <a:noFill/>
+        </p:spPr>
+        <p:txBody>
+          <a:bodyPr wrap="square" anchor="t" lIns="0" rIns="0" tIns="0" bIns="0">
+            <a:spAutoFit/>
+          </a:bodyPr>
+          <a:lstStyle/>
+          <a:p>
+            <a:pPr algn="l">
+              <a:lnSpc>
+                <a:spcPct val="115000"/>
+              </a:lnSpc>
+            </a:pPr>
+            <a:r>
+              <a:rPr sz="950" b="0">
+                <a:solidFill>
+                  <a:srgbClr val="5B6476"/>
+                </a:solidFill>
+                <a:latin typeface="맑은 고딕"/>
+              </a:rPr>
+              <a:t>최근 7일 실측 평균 · 그룹사·이차전지·정책 키워드 118개 기준</a:t>
+            </a:r>
+          </a:p>
+        </p:txBody>
+      </p:sp>
+      <p:sp>
+        <p:nvSpPr>
           <p:cNvPr id="13" name="Rounded Rectangle 12"/>
           <p:cNvSpPr/>
           <p:nvPr/>
         </p:nvSpPr>
         <p:spPr>
           <a:xfrm>
-            <a:off x="658368" y="3657600"/>
-            <a:ext cx="10874959" cy="603504"/>
+            <a:off x="4374794" y="1965960"/>
+            <a:ext cx="3442106" cy="1417320"/>
           </a:xfrm>
           <a:prstGeom prst="roundRect">
             <a:avLst>
@@ -6481,7 +6481,7 @@
             </a:avLst>
           </a:prstGeom>
           <a:solidFill>
-            <a:srgbClr val="EAF0FB"/>
+            <a:srgbClr val="F7F8FB"/>
           </a:solidFill>
           <a:ln w="12700">
             <a:solidFill>
@@ -6514,94 +6514,16 @@
       </p:sp>
       <p:sp>
         <p:nvSpPr>
-          <p:cNvPr id="14" name="TextBox 13"/>
-          <p:cNvSpPr txBox="1"/>
-          <p:nvPr/>
-        </p:nvSpPr>
-        <p:spPr>
-          <a:xfrm>
-            <a:off x="932688" y="3803904"/>
-            <a:ext cx="2926080" cy="365760"/>
-          </a:xfrm>
-          <a:prstGeom prst="rect">
-            <a:avLst/>
-          </a:prstGeom>
-          <a:noFill/>
-        </p:spPr>
-        <p:txBody>
-          <a:bodyPr wrap="square" anchor="t" lIns="0" rIns="0" tIns="0" bIns="0">
-            <a:spAutoFit/>
-          </a:bodyPr>
-          <a:lstStyle/>
-          <a:p>
-            <a:pPr algn="l">
-              <a:lnSpc>
-                <a:spcPct val="100000"/>
-              </a:lnSpc>
-            </a:pPr>
-            <a:r>
-              <a:rPr sz="2200" b="1">
-                <a:solidFill>
-                  <a:srgbClr val="16337A"/>
-                </a:solidFill>
-                <a:latin typeface="맑은 고딕"/>
-              </a:rPr>
-              <a:t>실제 알림 5~15건/일</a:t>
-            </a:r>
-          </a:p>
-        </p:txBody>
-      </p:sp>
-      <p:sp>
-        <p:nvSpPr>
-          <p:cNvPr id="15" name="TextBox 14"/>
-          <p:cNvSpPr txBox="1"/>
-          <p:nvPr/>
-        </p:nvSpPr>
-        <p:spPr>
-          <a:xfrm>
-            <a:off x="4224528" y="3858768"/>
-            <a:ext cx="7125920" cy="365760"/>
-          </a:xfrm>
-          <a:prstGeom prst="rect">
-            <a:avLst/>
-          </a:prstGeom>
-          <a:noFill/>
-        </p:spPr>
-        <p:txBody>
-          <a:bodyPr wrap="square" anchor="t" lIns="0" rIns="0" tIns="0" bIns="0">
-            <a:spAutoFit/>
-          </a:bodyPr>
-          <a:lstStyle/>
-          <a:p>
-            <a:pPr algn="l">
-              <a:lnSpc>
-                <a:spcPct val="120000"/>
-              </a:lnSpc>
-            </a:pPr>
-            <a:r>
-              <a:rPr sz="1150" b="0">
-                <a:solidFill>
-                  <a:srgbClr val="5B6476"/>
-                </a:solidFill>
-                <a:latin typeface="맑은 고딕"/>
-              </a:rPr>
-              <a:t>중요도 점수·관련성 필터·중복 제거를 거쳐 걸러진 것만</a:t>
-            </a:r>
-          </a:p>
-        </p:txBody>
-      </p:sp>
-      <p:sp>
-        <p:nvSpPr>
-          <p:cNvPr id="16" name="Oval 15"/>
+          <p:cNvPr id="14" name="Rectangle 13"/>
           <p:cNvSpPr/>
           <p:nvPr/>
         </p:nvSpPr>
         <p:spPr>
           <a:xfrm>
-            <a:off x="658368" y="4773168"/>
-            <a:ext cx="91440" cy="91440"/>
-          </a:xfrm>
-          <a:prstGeom prst="ellipse">
+            <a:off x="4374794" y="1965960"/>
+            <a:ext cx="3442106" cy="64008"/>
+          </a:xfrm>
+          <a:prstGeom prst="rect">
             <a:avLst/>
           </a:prstGeom>
           <a:solidFill>
@@ -6636,61 +6558,339 @@
       </p:sp>
       <p:sp>
         <p:nvSpPr>
+          <p:cNvPr id="15" name="TextBox 14"/>
+          <p:cNvSpPr txBox="1"/>
+          <p:nvPr/>
+        </p:nvSpPr>
+        <p:spPr>
+          <a:xfrm>
+            <a:off x="4594250" y="2157984"/>
+            <a:ext cx="3003194" cy="457200"/>
+          </a:xfrm>
+          <a:prstGeom prst="rect">
+            <a:avLst/>
+          </a:prstGeom>
+          <a:noFill/>
+        </p:spPr>
+        <p:txBody>
+          <a:bodyPr wrap="square" anchor="t" lIns="0" rIns="0" tIns="0" bIns="0">
+            <a:spAutoFit/>
+          </a:bodyPr>
+          <a:lstStyle/>
+          <a:p>
+            <a:pPr algn="l">
+              <a:lnSpc>
+                <a:spcPct val="115000"/>
+              </a:lnSpc>
+            </a:pPr>
+            <a:r>
+              <a:rPr sz="1150" b="1">
+                <a:solidFill>
+                  <a:srgbClr val="5B6476"/>
+                </a:solidFill>
+                <a:latin typeface="맑은 고딕"/>
+              </a:rPr>
+              <a:t>1주일만 지나도</a:t>
+            </a:r>
+          </a:p>
+        </p:txBody>
+      </p:sp>
+      <p:sp>
+        <p:nvSpPr>
+          <p:cNvPr id="16" name="TextBox 15"/>
+          <p:cNvSpPr txBox="1"/>
+          <p:nvPr/>
+        </p:nvSpPr>
+        <p:spPr>
+          <a:xfrm>
+            <a:off x="4594250" y="2523744"/>
+            <a:ext cx="3003194" cy="457200"/>
+          </a:xfrm>
+          <a:prstGeom prst="rect">
+            <a:avLst/>
+          </a:prstGeom>
+          <a:noFill/>
+        </p:spPr>
+        <p:txBody>
+          <a:bodyPr wrap="square" anchor="t" lIns="0" rIns="0" tIns="0" bIns="0">
+            <a:spAutoFit/>
+          </a:bodyPr>
+          <a:lstStyle/>
+          <a:p>
+            <a:pPr algn="l">
+              <a:lnSpc>
+                <a:spcPct val="100000"/>
+              </a:lnSpc>
+            </a:pPr>
+            <a:r>
+              <a:rPr sz="2500" b="1">
+                <a:solidFill>
+                  <a:srgbClr val="16337A"/>
+                </a:solidFill>
+                <a:latin typeface="맑은 고딕"/>
+              </a:rPr>
+              <a:t>2,607건</a:t>
+            </a:r>
+          </a:p>
+        </p:txBody>
+      </p:sp>
+      <p:sp>
+        <p:nvSpPr>
           <p:cNvPr id="17" name="TextBox 16"/>
           <p:cNvSpPr txBox="1"/>
           <p:nvPr/>
         </p:nvSpPr>
         <p:spPr>
           <a:xfrm>
-            <a:off x="914400" y="4709160"/>
-            <a:ext cx="10618927" cy="603504"/>
-          </a:xfrm>
-          <a:prstGeom prst="rect">
-            <a:avLst/>
-          </a:prstGeom>
-          <a:noFill/>
-        </p:spPr>
-        <p:txBody>
-          <a:bodyPr wrap="square" anchor="t" lIns="0" rIns="0" tIns="0" bIns="0">
-            <a:spAutoFit/>
-          </a:bodyPr>
-          <a:lstStyle/>
-          <a:p>
-            <a:pPr algn="l">
-              <a:lnSpc>
-                <a:spcPct val="130000"/>
-              </a:lnSpc>
-            </a:pPr>
-            <a:r>
-              <a:rPr sz="1350" b="1">
-                <a:solidFill>
-                  <a:srgbClr val="1B1F2A"/>
-                </a:solidFill>
-                <a:latin typeface="맑은 고딕"/>
-              </a:rPr>
-              <a:t>놓치면 큰일 나는 것</a:t>
-            </a:r>
-            <a:r>
-              <a:rPr sz="1350" b="0">
+            <a:off x="4594250" y="2980944"/>
+            <a:ext cx="3003194" cy="384048"/>
+          </a:xfrm>
+          <a:prstGeom prst="rect">
+            <a:avLst/>
+          </a:prstGeom>
+          <a:noFill/>
+        </p:spPr>
+        <p:txBody>
+          <a:bodyPr wrap="square" anchor="t" lIns="0" rIns="0" tIns="0" bIns="0">
+            <a:spAutoFit/>
+          </a:bodyPr>
+          <a:lstStyle/>
+          <a:p>
+            <a:pPr algn="l">
+              <a:lnSpc>
+                <a:spcPct val="115000"/>
+              </a:lnSpc>
+            </a:pPr>
+            <a:r>
+              <a:rPr sz="950" b="0">
                 <a:solidFill>
                   <a:srgbClr val="5B6476"/>
                 </a:solidFill>
                 <a:latin typeface="맑은 고딕"/>
               </a:rPr>
-              <a:t>  포스코 노조 파업 · 미국 반덤핑 관세 · 경쟁사 증설·투자 · IRA/CBAM 세부지침</a:t>
-            </a:r>
-          </a:p>
-        </p:txBody>
-      </p:sp>
-      <p:sp>
-        <p:nvSpPr>
-          <p:cNvPr id="18" name="Oval 17"/>
+              <a:t>7일 누적 수집 건수 (실측)</a:t>
+            </a:r>
+          </a:p>
+        </p:txBody>
+      </p:sp>
+      <p:sp>
+        <p:nvSpPr>
+          <p:cNvPr id="18" name="Rounded Rectangle 17"/>
           <p:cNvSpPr/>
           <p:nvPr/>
         </p:nvSpPr>
         <p:spPr>
           <a:xfrm>
-            <a:off x="658368" y="5376672"/>
+            <a:off x="8091220" y="1965960"/>
+            <a:ext cx="3442106" cy="1417320"/>
+          </a:xfrm>
+          <a:prstGeom prst="roundRect">
+            <a:avLst>
+              <a:gd name="adj" fmla="val 6000"/>
+            </a:avLst>
+          </a:prstGeom>
+          <a:solidFill>
+            <a:srgbClr val="F7F8FB"/>
+          </a:solidFill>
+          <a:ln w="12700">
+            <a:solidFill>
+              <a:srgbClr val="C8D6F0"/>
+            </a:solidFill>
+          </a:ln>
+          <a:effectLst/>
+        </p:spPr>
+        <p:style>
+          <a:lnRef idx="1">
+            <a:schemeClr val="accent1"/>
+          </a:lnRef>
+          <a:fillRef idx="3">
+            <a:schemeClr val="accent1"/>
+          </a:fillRef>
+          <a:effectRef idx="2">
+            <a:schemeClr val="accent1"/>
+          </a:effectRef>
+          <a:fontRef idx="minor">
+            <a:schemeClr val="lt1"/>
+          </a:fontRef>
+        </p:style>
+        <p:txBody>
+          <a:bodyPr rtlCol="0" anchor="ctr"/>
+          <a:lstStyle/>
+          <a:p>
+            <a:pPr algn="ctr"/>
+          </a:p>
+        </p:txBody>
+      </p:sp>
+      <p:sp>
+        <p:nvSpPr>
+          <p:cNvPr id="19" name="Rectangle 18"/>
+          <p:cNvSpPr/>
+          <p:nvPr/>
+        </p:nvSpPr>
+        <p:spPr>
+          <a:xfrm>
+            <a:off x="8091220" y="1965960"/>
+            <a:ext cx="3442106" cy="64008"/>
+          </a:xfrm>
+          <a:prstGeom prst="rect">
+            <a:avLst/>
+          </a:prstGeom>
+          <a:solidFill>
+            <a:srgbClr val="C0392B"/>
+          </a:solidFill>
+          <a:ln>
+            <a:noFill/>
+          </a:ln>
+          <a:effectLst/>
+        </p:spPr>
+        <p:style>
+          <a:lnRef idx="1">
+            <a:schemeClr val="accent1"/>
+          </a:lnRef>
+          <a:fillRef idx="3">
+            <a:schemeClr val="accent1"/>
+          </a:fillRef>
+          <a:effectRef idx="2">
+            <a:schemeClr val="accent1"/>
+          </a:effectRef>
+          <a:fontRef idx="minor">
+            <a:schemeClr val="lt1"/>
+          </a:fontRef>
+        </p:style>
+        <p:txBody>
+          <a:bodyPr rtlCol="0" anchor="ctr"/>
+          <a:lstStyle/>
+          <a:p>
+            <a:pPr algn="ctr"/>
+          </a:p>
+        </p:txBody>
+      </p:sp>
+      <p:sp>
+        <p:nvSpPr>
+          <p:cNvPr id="20" name="TextBox 19"/>
+          <p:cNvSpPr txBox="1"/>
+          <p:nvPr/>
+        </p:nvSpPr>
+        <p:spPr>
+          <a:xfrm>
+            <a:off x="8310676" y="2157984"/>
+            <a:ext cx="3003194" cy="457200"/>
+          </a:xfrm>
+          <a:prstGeom prst="rect">
+            <a:avLst/>
+          </a:prstGeom>
+          <a:noFill/>
+        </p:spPr>
+        <p:txBody>
+          <a:bodyPr wrap="square" anchor="t" lIns="0" rIns="0" tIns="0" bIns="0">
+            <a:spAutoFit/>
+          </a:bodyPr>
+          <a:lstStyle/>
+          <a:p>
+            <a:pPr algn="l">
+              <a:lnSpc>
+                <a:spcPct val="115000"/>
+              </a:lnSpc>
+            </a:pPr>
+            <a:r>
+              <a:rPr sz="1150" b="1">
+                <a:solidFill>
+                  <a:srgbClr val="5B6476"/>
+                </a:solidFill>
+                <a:latin typeface="맑은 고딕"/>
+              </a:rPr>
+              <a:t>사람이 건당 5분씩 분석한다면</a:t>
+            </a:r>
+          </a:p>
+        </p:txBody>
+      </p:sp>
+      <p:sp>
+        <p:nvSpPr>
+          <p:cNvPr id="21" name="TextBox 20"/>
+          <p:cNvSpPr txBox="1"/>
+          <p:nvPr/>
+        </p:nvSpPr>
+        <p:spPr>
+          <a:xfrm>
+            <a:off x="8310676" y="2523744"/>
+            <a:ext cx="3003194" cy="457200"/>
+          </a:xfrm>
+          <a:prstGeom prst="rect">
+            <a:avLst/>
+          </a:prstGeom>
+          <a:noFill/>
+        </p:spPr>
+        <p:txBody>
+          <a:bodyPr wrap="square" anchor="t" lIns="0" rIns="0" tIns="0" bIns="0">
+            <a:spAutoFit/>
+          </a:bodyPr>
+          <a:lstStyle/>
+          <a:p>
+            <a:pPr algn="l">
+              <a:lnSpc>
+                <a:spcPct val="100000"/>
+              </a:lnSpc>
+            </a:pPr>
+            <a:r>
+              <a:rPr sz="2500" b="1">
+                <a:solidFill>
+                  <a:srgbClr val="C0392B"/>
+                </a:solidFill>
+                <a:latin typeface="맑은 고딕"/>
+              </a:rPr>
+              <a:t>연 11,163시간</a:t>
+            </a:r>
+          </a:p>
+        </p:txBody>
+      </p:sp>
+      <p:sp>
+        <p:nvSpPr>
+          <p:cNvPr id="22" name="TextBox 21"/>
+          <p:cNvSpPr txBox="1"/>
+          <p:nvPr/>
+        </p:nvSpPr>
+        <p:spPr>
+          <a:xfrm>
+            <a:off x="8310676" y="2980944"/>
+            <a:ext cx="3003194" cy="384048"/>
+          </a:xfrm>
+          <a:prstGeom prst="rect">
+            <a:avLst/>
+          </a:prstGeom>
+          <a:noFill/>
+        </p:spPr>
+        <p:txBody>
+          <a:bodyPr wrap="square" anchor="t" lIns="0" rIns="0" tIns="0" bIns="0">
+            <a:spAutoFit/>
+          </a:bodyPr>
+          <a:lstStyle/>
+          <a:p>
+            <a:pPr algn="l">
+              <a:lnSpc>
+                <a:spcPct val="115000"/>
+              </a:lnSpc>
+            </a:pPr>
+            <a:r>
+              <a:rPr sz="950" b="0">
+                <a:solidFill>
+                  <a:srgbClr val="5B6476"/>
+                </a:solidFill>
+                <a:latin typeface="맑은 고딕"/>
+              </a:rPr>
+              <a:t>정규직 약 5.6명이 1년 내내 매달려야 하는 양</a:t>
+            </a:r>
+          </a:p>
+        </p:txBody>
+      </p:sp>
+      <p:sp>
+        <p:nvSpPr>
+          <p:cNvPr id="23" name="Oval 22"/>
+          <p:cNvSpPr/>
+          <p:nvPr/>
+        </p:nvSpPr>
+        <p:spPr>
+          <a:xfrm>
+            <a:off x="658368" y="3675888"/>
             <a:ext cx="91440" cy="91440"/>
           </a:xfrm>
           <a:prstGeom prst="ellipse">
@@ -6728,14 +6928,14 @@
       </p:sp>
       <p:sp>
         <p:nvSpPr>
-          <p:cNvPr id="19" name="TextBox 18"/>
-          <p:cNvSpPr txBox="1"/>
-          <p:nvPr/>
-        </p:nvSpPr>
-        <p:spPr>
-          <a:xfrm>
-            <a:off x="914400" y="5312664"/>
-            <a:ext cx="10618927" cy="603504"/>
+          <p:cNvPr id="24" name="TextBox 23"/>
+          <p:cNvSpPr txBox="1"/>
+          <p:nvPr/>
+        </p:nvSpPr>
+        <p:spPr>
+          <a:xfrm>
+            <a:off x="914400" y="3611880"/>
+            <a:ext cx="10618927" cy="566928"/>
           </a:xfrm>
           <a:prstGeom prst="rect">
             <a:avLst/>
@@ -6754,35 +6954,35 @@
               </a:lnSpc>
             </a:pPr>
             <a:r>
-              <a:rPr sz="1350" b="1">
+              <a:rPr sz="1250" b="1">
                 <a:solidFill>
                   <a:srgbClr val="1B1F2A"/>
                 </a:solidFill>
                 <a:latin typeface="맑은 고딕"/>
               </a:rPr>
-              <a:t>사람이 하던 일</a:t>
-            </a:r>
-            <a:r>
-              <a:rPr sz="1350" b="0">
+              <a:t>정보 과부하</a:t>
+            </a:r>
+            <a:r>
+              <a:rPr sz="1250" b="0">
                 <a:solidFill>
                   <a:srgbClr val="5B6476"/>
                 </a:solidFill>
                 <a:latin typeface="맑은 고딕"/>
               </a:rPr>
-              <a:t>  담당자가 아침마다 포털 검색 → 요약 → 관련자 공유 (1~2시간)</a:t>
-            </a:r>
-          </a:p>
-        </p:txBody>
-      </p:sp>
-      <p:sp>
-        <p:nvSpPr>
-          <p:cNvPr id="20" name="Oval 19"/>
+              <a:t>  기사가 넘쳐날수록 무엇을 먼저 봐야 할지 판단하기 어렵고, 확인 기준이 사람마다 달라 일관성을 유지하기 힘듭니다</a:t>
+            </a:r>
+          </a:p>
+        </p:txBody>
+      </p:sp>
+      <p:sp>
+        <p:nvSpPr>
+          <p:cNvPr id="25" name="Oval 24"/>
           <p:cNvSpPr/>
           <p:nvPr/>
         </p:nvSpPr>
         <p:spPr>
           <a:xfrm>
-            <a:off x="658368" y="5980176"/>
+            <a:off x="658368" y="4242816"/>
             <a:ext cx="91440" cy="91440"/>
           </a:xfrm>
           <a:prstGeom prst="ellipse">
@@ -6820,14 +7020,14 @@
       </p:sp>
       <p:sp>
         <p:nvSpPr>
-          <p:cNvPr id="21" name="TextBox 20"/>
-          <p:cNvSpPr txBox="1"/>
-          <p:nvPr/>
-        </p:nvSpPr>
-        <p:spPr>
-          <a:xfrm>
-            <a:off x="914400" y="5916168"/>
-            <a:ext cx="10618927" cy="603504"/>
+          <p:cNvPr id="26" name="TextBox 25"/>
+          <p:cNvSpPr txBox="1"/>
+          <p:nvPr/>
+        </p:nvSpPr>
+        <p:spPr>
+          <a:xfrm>
+            <a:off x="914400" y="4178808"/>
+            <a:ext cx="10618927" cy="566928"/>
           </a:xfrm>
           <a:prstGeom prst="rect">
             <a:avLst/>
@@ -6846,29 +7046,215 @@
               </a:lnSpc>
             </a:pPr>
             <a:r>
-              <a:rPr sz="1350" b="1">
+              <a:rPr sz="1250" b="1">
                 <a:solidFill>
                   <a:srgbClr val="1B1F2A"/>
                 </a:solidFill>
                 <a:latin typeface="맑은 고딕"/>
               </a:rPr>
-              <a:t>이 플랫폼이 하는 일</a:t>
-            </a:r>
-            <a:r>
-              <a:rPr sz="1350" b="0">
+              <a:t>놓치면 큰일 나는 것</a:t>
+            </a:r>
+            <a:r>
+              <a:rPr sz="1250" b="0">
                 <a:solidFill>
                   <a:srgbClr val="5B6476"/>
                 </a:solidFill>
                 <a:latin typeface="맑은 고딕"/>
               </a:rPr>
-              <a:t>  그 과정을 자동화하고, 중요한 건만 텔레그램으로 밀어 줌</a:t>
-            </a:r>
-          </a:p>
-        </p:txBody>
-      </p:sp>
-      <p:sp>
-        <p:nvSpPr>
-          <p:cNvPr id="22" name="TextBox 21"/>
+              <a:t>  포스코 노조 파업 · 미국 반덤핑 관세 · 경쟁사 증설·투자 · IRA/CBAM 세부지침</a:t>
+            </a:r>
+          </a:p>
+        </p:txBody>
+      </p:sp>
+      <p:sp>
+        <p:nvSpPr>
+          <p:cNvPr id="27" name="Oval 26"/>
+          <p:cNvSpPr/>
+          <p:nvPr/>
+        </p:nvSpPr>
+        <p:spPr>
+          <a:xfrm>
+            <a:off x="658368" y="4809744"/>
+            <a:ext cx="91440" cy="91440"/>
+          </a:xfrm>
+          <a:prstGeom prst="ellipse">
+            <a:avLst/>
+          </a:prstGeom>
+          <a:solidFill>
+            <a:srgbClr val="16337A"/>
+          </a:solidFill>
+          <a:ln>
+            <a:noFill/>
+          </a:ln>
+          <a:effectLst/>
+        </p:spPr>
+        <p:style>
+          <a:lnRef idx="1">
+            <a:schemeClr val="accent1"/>
+          </a:lnRef>
+          <a:fillRef idx="3">
+            <a:schemeClr val="accent1"/>
+          </a:fillRef>
+          <a:effectRef idx="2">
+            <a:schemeClr val="accent1"/>
+          </a:effectRef>
+          <a:fontRef idx="minor">
+            <a:schemeClr val="lt1"/>
+          </a:fontRef>
+        </p:style>
+        <p:txBody>
+          <a:bodyPr rtlCol="0" anchor="ctr"/>
+          <a:lstStyle/>
+          <a:p>
+            <a:pPr algn="ctr"/>
+          </a:p>
+        </p:txBody>
+      </p:sp>
+      <p:sp>
+        <p:nvSpPr>
+          <p:cNvPr id="28" name="TextBox 27"/>
+          <p:cNvSpPr txBox="1"/>
+          <p:nvPr/>
+        </p:nvSpPr>
+        <p:spPr>
+          <a:xfrm>
+            <a:off x="914400" y="4745736"/>
+            <a:ext cx="10618927" cy="566928"/>
+          </a:xfrm>
+          <a:prstGeom prst="rect">
+            <a:avLst/>
+          </a:prstGeom>
+          <a:noFill/>
+        </p:spPr>
+        <p:txBody>
+          <a:bodyPr wrap="square" anchor="t" lIns="0" rIns="0" tIns="0" bIns="0">
+            <a:spAutoFit/>
+          </a:bodyPr>
+          <a:lstStyle/>
+          <a:p>
+            <a:pPr algn="l">
+              <a:lnSpc>
+                <a:spcPct val="130000"/>
+              </a:lnSpc>
+            </a:pPr>
+            <a:r>
+              <a:rPr sz="1250" b="1">
+                <a:solidFill>
+                  <a:srgbClr val="1B1F2A"/>
+                </a:solidFill>
+                <a:latin typeface="맑은 고딕"/>
+              </a:rPr>
+              <a:t>AI 자동화의 역할</a:t>
+            </a:r>
+            <a:r>
+              <a:rPr sz="1250" b="0">
+                <a:solidFill>
+                  <a:srgbClr val="5B6476"/>
+                </a:solidFill>
+                <a:latin typeface="맑은 고딕"/>
+              </a:rPr>
+              <a:t>  AI가 자동으로 수집·분석해 핵심만 빠르게 파악하게 하고, 그만큼 빨리 대응 전략을 세울 수 있게 합니다</a:t>
+            </a:r>
+          </a:p>
+        </p:txBody>
+      </p:sp>
+      <p:sp>
+        <p:nvSpPr>
+          <p:cNvPr id="29" name="Rounded Rectangle 28"/>
+          <p:cNvSpPr/>
+          <p:nvPr/>
+        </p:nvSpPr>
+        <p:spPr>
+          <a:xfrm>
+            <a:off x="658368" y="5486400"/>
+            <a:ext cx="10874959" cy="530352"/>
+          </a:xfrm>
+          <a:prstGeom prst="roundRect">
+            <a:avLst>
+              <a:gd name="adj" fmla="val 6000"/>
+            </a:avLst>
+          </a:prstGeom>
+          <a:solidFill>
+            <a:srgbClr val="EAF0FB"/>
+          </a:solidFill>
+          <a:ln>
+            <a:noFill/>
+          </a:ln>
+          <a:effectLst/>
+        </p:spPr>
+        <p:style>
+          <a:lnRef idx="1">
+            <a:schemeClr val="accent1"/>
+          </a:lnRef>
+          <a:fillRef idx="3">
+            <a:schemeClr val="accent1"/>
+          </a:fillRef>
+          <a:effectRef idx="2">
+            <a:schemeClr val="accent1"/>
+          </a:effectRef>
+          <a:fontRef idx="minor">
+            <a:schemeClr val="lt1"/>
+          </a:fontRef>
+        </p:style>
+        <p:txBody>
+          <a:bodyPr rtlCol="0" anchor="ctr"/>
+          <a:lstStyle/>
+          <a:p>
+            <a:pPr algn="ctr"/>
+          </a:p>
+        </p:txBody>
+      </p:sp>
+      <p:sp>
+        <p:nvSpPr>
+          <p:cNvPr id="30" name="TextBox 29"/>
+          <p:cNvSpPr txBox="1"/>
+          <p:nvPr/>
+        </p:nvSpPr>
+        <p:spPr>
+          <a:xfrm>
+            <a:off x="932688" y="5632703"/>
+            <a:ext cx="10326319" cy="365760"/>
+          </a:xfrm>
+          <a:prstGeom prst="rect">
+            <a:avLst/>
+          </a:prstGeom>
+          <a:noFill/>
+        </p:spPr>
+        <p:txBody>
+          <a:bodyPr wrap="square" anchor="t" lIns="0" rIns="0" tIns="0" bIns="0">
+            <a:spAutoFit/>
+          </a:bodyPr>
+          <a:lstStyle/>
+          <a:p>
+            <a:pPr algn="l">
+              <a:lnSpc>
+                <a:spcPct val="120000"/>
+              </a:lnSpc>
+            </a:pPr>
+            <a:r>
+              <a:rPr sz="1250" b="1">
+                <a:solidFill>
+                  <a:srgbClr val="16337A"/>
+                </a:solidFill>
+                <a:latin typeface="맑은 고딕"/>
+              </a:rPr>
+              <a:t>결과  </a:t>
+            </a:r>
+            <a:r>
+              <a:rPr sz="1200" b="0">
+                <a:solidFill>
+                  <a:srgbClr val="1B1F2A"/>
+                </a:solidFill>
+                <a:latin typeface="맑은 고딕"/>
+              </a:rPr>
+              <a:t>확인에 드는 시간을 걷어낸 만큼, 회사의 리스크가 줄어듭니다.</a:t>
+            </a:r>
+          </a:p>
+        </p:txBody>
+      </p:sp>
+      <p:sp>
+        <p:nvSpPr>
+          <p:cNvPr id="31" name="TextBox 30"/>
           <p:cNvSpPr txBox="1"/>
           <p:nvPr/>
         </p:nvSpPr>
@@ -6907,7 +7293,7 @@
       </p:sp>
       <p:sp>
         <p:nvSpPr>
-          <p:cNvPr id="23" name="TextBox 22"/>
+          <p:cNvPr id="32" name="TextBox 31"/>
           <p:cNvSpPr txBox="1"/>
           <p:nvPr/>
         </p:nvSpPr>
